--- a/DigSite/New Arcaism/uarm 2026 a/hist fil antig/06 Platón Fedon Republica.pptx
+++ b/DigSite/New Arcaism/uarm 2026 a/hist fil antig/06 Platón Fedon Republica.pptx
@@ -15,9 +15,9 @@
     <p:sldId id="264" r:id="rId9"/>
     <p:sldId id="265" r:id="rId10"/>
     <p:sldId id="266" r:id="rId11"/>
-    <p:sldId id="267" r:id="rId12"/>
-    <p:sldId id="268" r:id="rId13"/>
-    <p:sldId id="269" r:id="rId14"/>
+    <p:sldId id="268" r:id="rId12"/>
+    <p:sldId id="269" r:id="rId13"/>
+    <p:sldId id="267" r:id="rId14"/>
   </p:sldIdLst>
   <p:sldSz cx="12192000" cy="6858000"/>
   <p:notesSz cx="6858000" cy="9144000"/>
@@ -116,6 +116,11 @@
       </a:defRPr>
     </a:lvl9pPr>
   </p:defaultTextStyle>
+  <p:extLst>
+    <p:ext uri="{EFAFB233-063F-42B5-8137-9DF3F51BA10A}">
+      <p15:sldGuideLst xmlns:p15="http://schemas.microsoft.com/office/powerpoint/2012/main"/>
+    </p:ext>
+  </p:extLst>
 </p:presentation>
 </file>
 
@@ -268,7 +273,7 @@
           <a:p>
             <a:fld id="{1A6E136C-3E63-4557-9D0A-77E9D2D1C364}" type="datetimeFigureOut">
               <a:rPr lang="es-PE" smtClean="0"/>
-              <a:t>17/05/2026</a:t>
+              <a:t>20/05/2026</a:t>
             </a:fld>
             <a:endParaRPr lang="es-PE"/>
           </a:p>
@@ -468,7 +473,7 @@
           <a:p>
             <a:fld id="{1A6E136C-3E63-4557-9D0A-77E9D2D1C364}" type="datetimeFigureOut">
               <a:rPr lang="es-PE" smtClean="0"/>
-              <a:t>17/05/2026</a:t>
+              <a:t>20/05/2026</a:t>
             </a:fld>
             <a:endParaRPr lang="es-PE"/>
           </a:p>
@@ -678,7 +683,7 @@
           <a:p>
             <a:fld id="{1A6E136C-3E63-4557-9D0A-77E9D2D1C364}" type="datetimeFigureOut">
               <a:rPr lang="es-PE" smtClean="0"/>
-              <a:t>17/05/2026</a:t>
+              <a:t>20/05/2026</a:t>
             </a:fld>
             <a:endParaRPr lang="es-PE"/>
           </a:p>
@@ -878,7 +883,7 @@
           <a:p>
             <a:fld id="{1A6E136C-3E63-4557-9D0A-77E9D2D1C364}" type="datetimeFigureOut">
               <a:rPr lang="es-PE" smtClean="0"/>
-              <a:t>17/05/2026</a:t>
+              <a:t>20/05/2026</a:t>
             </a:fld>
             <a:endParaRPr lang="es-PE"/>
           </a:p>
@@ -1154,7 +1159,7 @@
           <a:p>
             <a:fld id="{1A6E136C-3E63-4557-9D0A-77E9D2D1C364}" type="datetimeFigureOut">
               <a:rPr lang="es-PE" smtClean="0"/>
-              <a:t>17/05/2026</a:t>
+              <a:t>20/05/2026</a:t>
             </a:fld>
             <a:endParaRPr lang="es-PE"/>
           </a:p>
@@ -1422,7 +1427,7 @@
           <a:p>
             <a:fld id="{1A6E136C-3E63-4557-9D0A-77E9D2D1C364}" type="datetimeFigureOut">
               <a:rPr lang="es-PE" smtClean="0"/>
-              <a:t>17/05/2026</a:t>
+              <a:t>20/05/2026</a:t>
             </a:fld>
             <a:endParaRPr lang="es-PE"/>
           </a:p>
@@ -1837,7 +1842,7 @@
           <a:p>
             <a:fld id="{1A6E136C-3E63-4557-9D0A-77E9D2D1C364}" type="datetimeFigureOut">
               <a:rPr lang="es-PE" smtClean="0"/>
-              <a:t>17/05/2026</a:t>
+              <a:t>20/05/2026</a:t>
             </a:fld>
             <a:endParaRPr lang="es-PE"/>
           </a:p>
@@ -1979,7 +1984,7 @@
           <a:p>
             <a:fld id="{1A6E136C-3E63-4557-9D0A-77E9D2D1C364}" type="datetimeFigureOut">
               <a:rPr lang="es-PE" smtClean="0"/>
-              <a:t>17/05/2026</a:t>
+              <a:t>20/05/2026</a:t>
             </a:fld>
             <a:endParaRPr lang="es-PE"/>
           </a:p>
@@ -2092,7 +2097,7 @@
           <a:p>
             <a:fld id="{1A6E136C-3E63-4557-9D0A-77E9D2D1C364}" type="datetimeFigureOut">
               <a:rPr lang="es-PE" smtClean="0"/>
-              <a:t>17/05/2026</a:t>
+              <a:t>20/05/2026</a:t>
             </a:fld>
             <a:endParaRPr lang="es-PE"/>
           </a:p>
@@ -2405,7 +2410,7 @@
           <a:p>
             <a:fld id="{1A6E136C-3E63-4557-9D0A-77E9D2D1C364}" type="datetimeFigureOut">
               <a:rPr lang="es-PE" smtClean="0"/>
-              <a:t>17/05/2026</a:t>
+              <a:t>20/05/2026</a:t>
             </a:fld>
             <a:endParaRPr lang="es-PE"/>
           </a:p>
@@ -2694,7 +2699,7 @@
           <a:p>
             <a:fld id="{1A6E136C-3E63-4557-9D0A-77E9D2D1C364}" type="datetimeFigureOut">
               <a:rPr lang="es-PE" smtClean="0"/>
-              <a:t>17/05/2026</a:t>
+              <a:t>20/05/2026</a:t>
             </a:fld>
             <a:endParaRPr lang="es-PE"/>
           </a:p>
@@ -2937,7 +2942,7 @@
           <a:p>
             <a:fld id="{1A6E136C-3E63-4557-9D0A-77E9D2D1C364}" type="datetimeFigureOut">
               <a:rPr lang="es-PE" smtClean="0"/>
-              <a:t>17/05/2026</a:t>
+              <a:t>20/05/2026</a:t>
             </a:fld>
             <a:endParaRPr lang="es-PE"/>
           </a:p>
@@ -3648,774 +3653,6 @@
 </file>
 
 <file path=ppt/slides/slide11.xml><?xml version="1.0" encoding="utf-8"?>
-<p:sld xmlns:a="http://schemas.openxmlformats.org/drawingml/2006/main" xmlns:r="http://schemas.openxmlformats.org/officeDocument/2006/relationships" xmlns:p="http://schemas.openxmlformats.org/presentationml/2006/main">
-  <p:cSld>
-    <p:spTree>
-      <p:nvGrpSpPr>
-        <p:cNvPr id="1" name="">
-          <a:extLst>
-            <a:ext uri="{FF2B5EF4-FFF2-40B4-BE49-F238E27FC236}">
-              <a16:creationId xmlns:a16="http://schemas.microsoft.com/office/drawing/2014/main" id="{9ED86250-4C33-ED30-FC66-E913317A9571}"/>
-            </a:ext>
-          </a:extLst>
-        </p:cNvPr>
-        <p:cNvGrpSpPr/>
-        <p:nvPr/>
-      </p:nvGrpSpPr>
-      <p:grpSpPr>
-        <a:xfrm>
-          <a:off x="0" y="0"/>
-          <a:ext cx="0" cy="0"/>
-          <a:chOff x="0" y="0"/>
-          <a:chExt cx="0" cy="0"/>
-        </a:xfrm>
-      </p:grpSpPr>
-      <p:sp>
-        <p:nvSpPr>
-          <p:cNvPr id="2" name="Title 1">
-            <a:extLst>
-              <a:ext uri="{FF2B5EF4-FFF2-40B4-BE49-F238E27FC236}">
-                <a16:creationId xmlns:a16="http://schemas.microsoft.com/office/drawing/2014/main" id="{48E0CA0D-EA6F-9FEE-76E5-FD1A1C1B4571}"/>
-              </a:ext>
-            </a:extLst>
-          </p:cNvPr>
-          <p:cNvSpPr>
-            <a:spLocks noGrp="1"/>
-          </p:cNvSpPr>
-          <p:nvPr>
-            <p:ph type="title"/>
-          </p:nvPr>
-        </p:nvSpPr>
-        <p:spPr>
-          <a:xfrm>
-            <a:off x="182593" y="73073"/>
-            <a:ext cx="10515600" cy="1325563"/>
-          </a:xfrm>
-        </p:spPr>
-        <p:txBody>
-          <a:bodyPr/>
-          <a:lstStyle/>
-          <a:p>
-            <a:r>
-              <a:rPr lang="es-MX" dirty="0"/>
-              <a:t>La república</a:t>
-            </a:r>
-            <a:endParaRPr lang="es-PE" dirty="0"/>
-          </a:p>
-        </p:txBody>
-      </p:sp>
-      <p:sp>
-        <p:nvSpPr>
-          <p:cNvPr id="3" name="Content Placeholder 4">
-            <a:extLst>
-              <a:ext uri="{FF2B5EF4-FFF2-40B4-BE49-F238E27FC236}">
-                <a16:creationId xmlns:a16="http://schemas.microsoft.com/office/drawing/2014/main" id="{B8DFFCF7-A823-9F15-0F9E-1179B5EF0B8E}"/>
-              </a:ext>
-            </a:extLst>
-          </p:cNvPr>
-          <p:cNvSpPr>
-            <a:spLocks noGrp="1"/>
-          </p:cNvSpPr>
-          <p:nvPr>
-            <p:ph idx="1"/>
-          </p:nvPr>
-        </p:nvSpPr>
-        <p:spPr>
-          <a:xfrm>
-            <a:off x="838200" y="1485307"/>
-            <a:ext cx="10515600" cy="4351338"/>
-          </a:xfrm>
-        </p:spPr>
-        <p:txBody>
-          <a:bodyPr>
-            <a:normAutofit/>
-          </a:bodyPr>
-          <a:lstStyle/>
-          <a:p>
-            <a:pPr marL="0" indent="0">
-              <a:buNone/>
-            </a:pPr>
-            <a:r>
-              <a:rPr lang="es-MX" dirty="0"/>
-              <a:t>Sócrates                             Céfalo                               Polemarco   </a:t>
-            </a:r>
-          </a:p>
-          <a:p>
-            <a:pPr marL="0" indent="0">
-              <a:buNone/>
-            </a:pPr>
-            <a:endParaRPr lang="es-MX" dirty="0"/>
-          </a:p>
-          <a:p>
-            <a:pPr marL="0" indent="0">
-              <a:buNone/>
-            </a:pPr>
-            <a:endParaRPr lang="es-MX" dirty="0"/>
-          </a:p>
-          <a:p>
-            <a:pPr marL="0" indent="0">
-              <a:buNone/>
-            </a:pPr>
-            <a:endParaRPr lang="es-MX" dirty="0"/>
-          </a:p>
-          <a:p>
-            <a:pPr marL="0" indent="0">
-              <a:buNone/>
-            </a:pPr>
-            <a:endParaRPr lang="es-MX" dirty="0"/>
-          </a:p>
-          <a:p>
-            <a:pPr marL="0" indent="0">
-              <a:buNone/>
-            </a:pPr>
-            <a:r>
-              <a:rPr lang="es-MX" dirty="0" err="1"/>
-              <a:t>Trasímaco</a:t>
-            </a:r>
-            <a:r>
-              <a:rPr lang="es-MX" dirty="0"/>
-              <a:t>                          Glaucón                              </a:t>
-            </a:r>
-            <a:r>
-              <a:rPr lang="es-MX" dirty="0" err="1"/>
-              <a:t>Adimanto</a:t>
-            </a:r>
-            <a:endParaRPr lang="es-PE" dirty="0"/>
-          </a:p>
-        </p:txBody>
-      </p:sp>
-      <p:sp>
-        <p:nvSpPr>
-          <p:cNvPr id="4" name="Content Placeholder 4">
-            <a:extLst>
-              <a:ext uri="{FF2B5EF4-FFF2-40B4-BE49-F238E27FC236}">
-                <a16:creationId xmlns:a16="http://schemas.microsoft.com/office/drawing/2014/main" id="{CFE8FC43-BFF8-9385-CC19-AA8516A3F2DB}"/>
-              </a:ext>
-            </a:extLst>
-          </p:cNvPr>
-          <p:cNvSpPr txBox="1">
-            <a:spLocks/>
-          </p:cNvSpPr>
-          <p:nvPr/>
-        </p:nvSpPr>
-        <p:spPr>
-          <a:xfrm>
-            <a:off x="838200" y="1975638"/>
-            <a:ext cx="10515600" cy="1165127"/>
-          </a:xfrm>
-          <a:prstGeom prst="rect">
-            <a:avLst/>
-          </a:prstGeom>
-        </p:spPr>
-        <p:txBody>
-          <a:bodyPr vert="horz" lIns="91440" tIns="45720" rIns="91440" bIns="45720" rtlCol="0">
-            <a:normAutofit/>
-          </a:bodyPr>
-          <a:lstStyle>
-            <a:lvl1pPr marL="228600" indent="-228600" algn="l" defTabSz="914400" rtl="0" eaLnBrk="1" latinLnBrk="0" hangingPunct="1">
-              <a:lnSpc>
-                <a:spcPct val="90000"/>
-              </a:lnSpc>
-              <a:spcBef>
-                <a:spcPts val="1000"/>
-              </a:spcBef>
-              <a:buFont typeface="Arial" panose="020B0604020202020204" pitchFamily="34" charset="0"/>
-              <a:buChar char="•"/>
-              <a:defRPr sz="2800" kern="1200">
-                <a:solidFill>
-                  <a:schemeClr val="tx1"/>
-                </a:solidFill>
-                <a:latin typeface="+mn-lt"/>
-                <a:ea typeface="+mn-ea"/>
-                <a:cs typeface="+mn-cs"/>
-              </a:defRPr>
-            </a:lvl1pPr>
-            <a:lvl2pPr marL="685800" indent="-228600" algn="l" defTabSz="914400" rtl="0" eaLnBrk="1" latinLnBrk="0" hangingPunct="1">
-              <a:lnSpc>
-                <a:spcPct val="90000"/>
-              </a:lnSpc>
-              <a:spcBef>
-                <a:spcPts val="500"/>
-              </a:spcBef>
-              <a:buFont typeface="Arial" panose="020B0604020202020204" pitchFamily="34" charset="0"/>
-              <a:buChar char="•"/>
-              <a:defRPr sz="2400" kern="1200">
-                <a:solidFill>
-                  <a:schemeClr val="tx1"/>
-                </a:solidFill>
-                <a:latin typeface="+mn-lt"/>
-                <a:ea typeface="+mn-ea"/>
-                <a:cs typeface="+mn-cs"/>
-              </a:defRPr>
-            </a:lvl2pPr>
-            <a:lvl3pPr marL="1143000" indent="-228600" algn="l" defTabSz="914400" rtl="0" eaLnBrk="1" latinLnBrk="0" hangingPunct="1">
-              <a:lnSpc>
-                <a:spcPct val="90000"/>
-              </a:lnSpc>
-              <a:spcBef>
-                <a:spcPts val="500"/>
-              </a:spcBef>
-              <a:buFont typeface="Arial" panose="020B0604020202020204" pitchFamily="34" charset="0"/>
-              <a:buChar char="•"/>
-              <a:defRPr sz="2000" kern="1200">
-                <a:solidFill>
-                  <a:schemeClr val="tx1"/>
-                </a:solidFill>
-                <a:latin typeface="+mn-lt"/>
-                <a:ea typeface="+mn-ea"/>
-                <a:cs typeface="+mn-cs"/>
-              </a:defRPr>
-            </a:lvl3pPr>
-            <a:lvl4pPr marL="1600200" indent="-228600" algn="l" defTabSz="914400" rtl="0" eaLnBrk="1" latinLnBrk="0" hangingPunct="1">
-              <a:lnSpc>
-                <a:spcPct val="90000"/>
-              </a:lnSpc>
-              <a:spcBef>
-                <a:spcPts val="500"/>
-              </a:spcBef>
-              <a:buFont typeface="Arial" panose="020B0604020202020204" pitchFamily="34" charset="0"/>
-              <a:buChar char="•"/>
-              <a:defRPr sz="1800" kern="1200">
-                <a:solidFill>
-                  <a:schemeClr val="tx1"/>
-                </a:solidFill>
-                <a:latin typeface="+mn-lt"/>
-                <a:ea typeface="+mn-ea"/>
-                <a:cs typeface="+mn-cs"/>
-              </a:defRPr>
-            </a:lvl4pPr>
-            <a:lvl5pPr marL="2057400" indent="-228600" algn="l" defTabSz="914400" rtl="0" eaLnBrk="1" latinLnBrk="0" hangingPunct="1">
-              <a:lnSpc>
-                <a:spcPct val="90000"/>
-              </a:lnSpc>
-              <a:spcBef>
-                <a:spcPts val="500"/>
-              </a:spcBef>
-              <a:buFont typeface="Arial" panose="020B0604020202020204" pitchFamily="34" charset="0"/>
-              <a:buChar char="•"/>
-              <a:defRPr sz="1800" kern="1200">
-                <a:solidFill>
-                  <a:schemeClr val="tx1"/>
-                </a:solidFill>
-                <a:latin typeface="+mn-lt"/>
-                <a:ea typeface="+mn-ea"/>
-                <a:cs typeface="+mn-cs"/>
-              </a:defRPr>
-            </a:lvl5pPr>
-            <a:lvl6pPr marL="2514600" indent="-228600" algn="l" defTabSz="914400" rtl="0" eaLnBrk="1" latinLnBrk="0" hangingPunct="1">
-              <a:lnSpc>
-                <a:spcPct val="90000"/>
-              </a:lnSpc>
-              <a:spcBef>
-                <a:spcPts val="500"/>
-              </a:spcBef>
-              <a:buFont typeface="Arial" panose="020B0604020202020204" pitchFamily="34" charset="0"/>
-              <a:buChar char="•"/>
-              <a:defRPr sz="1800" kern="1200">
-                <a:solidFill>
-                  <a:schemeClr val="tx1"/>
-                </a:solidFill>
-                <a:latin typeface="+mn-lt"/>
-                <a:ea typeface="+mn-ea"/>
-                <a:cs typeface="+mn-cs"/>
-              </a:defRPr>
-            </a:lvl6pPr>
-            <a:lvl7pPr marL="2971800" indent="-228600" algn="l" defTabSz="914400" rtl="0" eaLnBrk="1" latinLnBrk="0" hangingPunct="1">
-              <a:lnSpc>
-                <a:spcPct val="90000"/>
-              </a:lnSpc>
-              <a:spcBef>
-                <a:spcPts val="500"/>
-              </a:spcBef>
-              <a:buFont typeface="Arial" panose="020B0604020202020204" pitchFamily="34" charset="0"/>
-              <a:buChar char="•"/>
-              <a:defRPr sz="1800" kern="1200">
-                <a:solidFill>
-                  <a:schemeClr val="tx1"/>
-                </a:solidFill>
-                <a:latin typeface="+mn-lt"/>
-                <a:ea typeface="+mn-ea"/>
-                <a:cs typeface="+mn-cs"/>
-              </a:defRPr>
-            </a:lvl7pPr>
-            <a:lvl8pPr marL="3429000" indent="-228600" algn="l" defTabSz="914400" rtl="0" eaLnBrk="1" latinLnBrk="0" hangingPunct="1">
-              <a:lnSpc>
-                <a:spcPct val="90000"/>
-              </a:lnSpc>
-              <a:spcBef>
-                <a:spcPts val="500"/>
-              </a:spcBef>
-              <a:buFont typeface="Arial" panose="020B0604020202020204" pitchFamily="34" charset="0"/>
-              <a:buChar char="•"/>
-              <a:defRPr sz="1800" kern="1200">
-                <a:solidFill>
-                  <a:schemeClr val="tx1"/>
-                </a:solidFill>
-                <a:latin typeface="+mn-lt"/>
-                <a:ea typeface="+mn-ea"/>
-                <a:cs typeface="+mn-cs"/>
-              </a:defRPr>
-            </a:lvl8pPr>
-            <a:lvl9pPr marL="3886200" indent="-228600" algn="l" defTabSz="914400" rtl="0" eaLnBrk="1" latinLnBrk="0" hangingPunct="1">
-              <a:lnSpc>
-                <a:spcPct val="90000"/>
-              </a:lnSpc>
-              <a:spcBef>
-                <a:spcPts val="500"/>
-              </a:spcBef>
-              <a:buFont typeface="Arial" panose="020B0604020202020204" pitchFamily="34" charset="0"/>
-              <a:buChar char="•"/>
-              <a:defRPr sz="1800" kern="1200">
-                <a:solidFill>
-                  <a:schemeClr val="tx1"/>
-                </a:solidFill>
-                <a:latin typeface="+mn-lt"/>
-                <a:ea typeface="+mn-ea"/>
-                <a:cs typeface="+mn-cs"/>
-              </a:defRPr>
-            </a:lvl9pPr>
-          </a:lstStyle>
-          <a:p>
-            <a:pPr marL="0" indent="0">
-              <a:buFont typeface="Arial" panose="020B0604020202020204" pitchFamily="34" charset="0"/>
-              <a:buNone/>
-            </a:pPr>
-            <a:r>
-              <a:rPr lang="es-MX" dirty="0"/>
-              <a:t>Busca definir                          Visión tradicional de justicia (distributiva)</a:t>
-            </a:r>
-          </a:p>
-          <a:p>
-            <a:pPr marL="0" indent="0">
-              <a:buFont typeface="Arial" panose="020B0604020202020204" pitchFamily="34" charset="0"/>
-              <a:buNone/>
-            </a:pPr>
-            <a:r>
-              <a:rPr lang="es-MX" dirty="0"/>
-              <a:t>Justicia</a:t>
-            </a:r>
-            <a:endParaRPr lang="es-PE" dirty="0"/>
-          </a:p>
-        </p:txBody>
-      </p:sp>
-      <p:sp>
-        <p:nvSpPr>
-          <p:cNvPr id="5" name="Content Placeholder 4">
-            <a:extLst>
-              <a:ext uri="{FF2B5EF4-FFF2-40B4-BE49-F238E27FC236}">
-                <a16:creationId xmlns:a16="http://schemas.microsoft.com/office/drawing/2014/main" id="{70DA167E-14BC-044F-AC70-1AC34AF74660}"/>
-              </a:ext>
-            </a:extLst>
-          </p:cNvPr>
-          <p:cNvSpPr txBox="1">
-            <a:spLocks/>
-          </p:cNvSpPr>
-          <p:nvPr/>
-        </p:nvSpPr>
-        <p:spPr>
-          <a:xfrm>
-            <a:off x="838200" y="4609258"/>
-            <a:ext cx="10515600" cy="4351338"/>
-          </a:xfrm>
-          <a:prstGeom prst="rect">
-            <a:avLst/>
-          </a:prstGeom>
-        </p:spPr>
-        <p:txBody>
-          <a:bodyPr vert="horz" lIns="91440" tIns="45720" rIns="91440" bIns="45720" rtlCol="0">
-            <a:normAutofit/>
-          </a:bodyPr>
-          <a:lstStyle>
-            <a:lvl1pPr marL="228600" indent="-228600" algn="l" defTabSz="914400" rtl="0" eaLnBrk="1" latinLnBrk="0" hangingPunct="1">
-              <a:lnSpc>
-                <a:spcPct val="90000"/>
-              </a:lnSpc>
-              <a:spcBef>
-                <a:spcPts val="1000"/>
-              </a:spcBef>
-              <a:buFont typeface="Arial" panose="020B0604020202020204" pitchFamily="34" charset="0"/>
-              <a:buChar char="•"/>
-              <a:defRPr sz="2800" kern="1200">
-                <a:solidFill>
-                  <a:schemeClr val="tx1"/>
-                </a:solidFill>
-                <a:latin typeface="+mn-lt"/>
-                <a:ea typeface="+mn-ea"/>
-                <a:cs typeface="+mn-cs"/>
-              </a:defRPr>
-            </a:lvl1pPr>
-            <a:lvl2pPr marL="685800" indent="-228600" algn="l" defTabSz="914400" rtl="0" eaLnBrk="1" latinLnBrk="0" hangingPunct="1">
-              <a:lnSpc>
-                <a:spcPct val="90000"/>
-              </a:lnSpc>
-              <a:spcBef>
-                <a:spcPts val="500"/>
-              </a:spcBef>
-              <a:buFont typeface="Arial" panose="020B0604020202020204" pitchFamily="34" charset="0"/>
-              <a:buChar char="•"/>
-              <a:defRPr sz="2400" kern="1200">
-                <a:solidFill>
-                  <a:schemeClr val="tx1"/>
-                </a:solidFill>
-                <a:latin typeface="+mn-lt"/>
-                <a:ea typeface="+mn-ea"/>
-                <a:cs typeface="+mn-cs"/>
-              </a:defRPr>
-            </a:lvl2pPr>
-            <a:lvl3pPr marL="1143000" indent="-228600" algn="l" defTabSz="914400" rtl="0" eaLnBrk="1" latinLnBrk="0" hangingPunct="1">
-              <a:lnSpc>
-                <a:spcPct val="90000"/>
-              </a:lnSpc>
-              <a:spcBef>
-                <a:spcPts val="500"/>
-              </a:spcBef>
-              <a:buFont typeface="Arial" panose="020B0604020202020204" pitchFamily="34" charset="0"/>
-              <a:buChar char="•"/>
-              <a:defRPr sz="2000" kern="1200">
-                <a:solidFill>
-                  <a:schemeClr val="tx1"/>
-                </a:solidFill>
-                <a:latin typeface="+mn-lt"/>
-                <a:ea typeface="+mn-ea"/>
-                <a:cs typeface="+mn-cs"/>
-              </a:defRPr>
-            </a:lvl3pPr>
-            <a:lvl4pPr marL="1600200" indent="-228600" algn="l" defTabSz="914400" rtl="0" eaLnBrk="1" latinLnBrk="0" hangingPunct="1">
-              <a:lnSpc>
-                <a:spcPct val="90000"/>
-              </a:lnSpc>
-              <a:spcBef>
-                <a:spcPts val="500"/>
-              </a:spcBef>
-              <a:buFont typeface="Arial" panose="020B0604020202020204" pitchFamily="34" charset="0"/>
-              <a:buChar char="•"/>
-              <a:defRPr sz="1800" kern="1200">
-                <a:solidFill>
-                  <a:schemeClr val="tx1"/>
-                </a:solidFill>
-                <a:latin typeface="+mn-lt"/>
-                <a:ea typeface="+mn-ea"/>
-                <a:cs typeface="+mn-cs"/>
-              </a:defRPr>
-            </a:lvl4pPr>
-            <a:lvl5pPr marL="2057400" indent="-228600" algn="l" defTabSz="914400" rtl="0" eaLnBrk="1" latinLnBrk="0" hangingPunct="1">
-              <a:lnSpc>
-                <a:spcPct val="90000"/>
-              </a:lnSpc>
-              <a:spcBef>
-                <a:spcPts val="500"/>
-              </a:spcBef>
-              <a:buFont typeface="Arial" panose="020B0604020202020204" pitchFamily="34" charset="0"/>
-              <a:buChar char="•"/>
-              <a:defRPr sz="1800" kern="1200">
-                <a:solidFill>
-                  <a:schemeClr val="tx1"/>
-                </a:solidFill>
-                <a:latin typeface="+mn-lt"/>
-                <a:ea typeface="+mn-ea"/>
-                <a:cs typeface="+mn-cs"/>
-              </a:defRPr>
-            </a:lvl5pPr>
-            <a:lvl6pPr marL="2514600" indent="-228600" algn="l" defTabSz="914400" rtl="0" eaLnBrk="1" latinLnBrk="0" hangingPunct="1">
-              <a:lnSpc>
-                <a:spcPct val="90000"/>
-              </a:lnSpc>
-              <a:spcBef>
-                <a:spcPts val="500"/>
-              </a:spcBef>
-              <a:buFont typeface="Arial" panose="020B0604020202020204" pitchFamily="34" charset="0"/>
-              <a:buChar char="•"/>
-              <a:defRPr sz="1800" kern="1200">
-                <a:solidFill>
-                  <a:schemeClr val="tx1"/>
-                </a:solidFill>
-                <a:latin typeface="+mn-lt"/>
-                <a:ea typeface="+mn-ea"/>
-                <a:cs typeface="+mn-cs"/>
-              </a:defRPr>
-            </a:lvl6pPr>
-            <a:lvl7pPr marL="2971800" indent="-228600" algn="l" defTabSz="914400" rtl="0" eaLnBrk="1" latinLnBrk="0" hangingPunct="1">
-              <a:lnSpc>
-                <a:spcPct val="90000"/>
-              </a:lnSpc>
-              <a:spcBef>
-                <a:spcPts val="500"/>
-              </a:spcBef>
-              <a:buFont typeface="Arial" panose="020B0604020202020204" pitchFamily="34" charset="0"/>
-              <a:buChar char="•"/>
-              <a:defRPr sz="1800" kern="1200">
-                <a:solidFill>
-                  <a:schemeClr val="tx1"/>
-                </a:solidFill>
-                <a:latin typeface="+mn-lt"/>
-                <a:ea typeface="+mn-ea"/>
-                <a:cs typeface="+mn-cs"/>
-              </a:defRPr>
-            </a:lvl7pPr>
-            <a:lvl8pPr marL="3429000" indent="-228600" algn="l" defTabSz="914400" rtl="0" eaLnBrk="1" latinLnBrk="0" hangingPunct="1">
-              <a:lnSpc>
-                <a:spcPct val="90000"/>
-              </a:lnSpc>
-              <a:spcBef>
-                <a:spcPts val="500"/>
-              </a:spcBef>
-              <a:buFont typeface="Arial" panose="020B0604020202020204" pitchFamily="34" charset="0"/>
-              <a:buChar char="•"/>
-              <a:defRPr sz="1800" kern="1200">
-                <a:solidFill>
-                  <a:schemeClr val="tx1"/>
-                </a:solidFill>
-                <a:latin typeface="+mn-lt"/>
-                <a:ea typeface="+mn-ea"/>
-                <a:cs typeface="+mn-cs"/>
-              </a:defRPr>
-            </a:lvl8pPr>
-            <a:lvl9pPr marL="3886200" indent="-228600" algn="l" defTabSz="914400" rtl="0" eaLnBrk="1" latinLnBrk="0" hangingPunct="1">
-              <a:lnSpc>
-                <a:spcPct val="90000"/>
-              </a:lnSpc>
-              <a:spcBef>
-                <a:spcPts val="500"/>
-              </a:spcBef>
-              <a:buFont typeface="Arial" panose="020B0604020202020204" pitchFamily="34" charset="0"/>
-              <a:buChar char="•"/>
-              <a:defRPr sz="1800" kern="1200">
-                <a:solidFill>
-                  <a:schemeClr val="tx1"/>
-                </a:solidFill>
-                <a:latin typeface="+mn-lt"/>
-                <a:ea typeface="+mn-ea"/>
-                <a:cs typeface="+mn-cs"/>
-              </a:defRPr>
-            </a:lvl9pPr>
-          </a:lstStyle>
-          <a:p>
-            <a:pPr marL="0" indent="0">
-              <a:buFont typeface="Arial" panose="020B0604020202020204" pitchFamily="34" charset="0"/>
-              <a:buNone/>
-            </a:pPr>
-            <a:r>
-              <a:rPr lang="es-MX" dirty="0"/>
-              <a:t>Sofista: Justicia                    hermanos de Platón: La justicia es deseable</a:t>
-            </a:r>
-          </a:p>
-          <a:p>
-            <a:pPr marL="0" indent="0">
-              <a:buFont typeface="Arial" panose="020B0604020202020204" pitchFamily="34" charset="0"/>
-              <a:buNone/>
-            </a:pPr>
-            <a:r>
-              <a:rPr lang="es-MX" dirty="0"/>
-              <a:t>Lo que conviene                  por sí misma.</a:t>
-            </a:r>
-          </a:p>
-          <a:p>
-            <a:pPr marL="0" indent="0">
-              <a:buFont typeface="Arial" panose="020B0604020202020204" pitchFamily="34" charset="0"/>
-              <a:buNone/>
-            </a:pPr>
-            <a:r>
-              <a:rPr lang="es-MX" dirty="0"/>
-              <a:t>Al mas fuerte</a:t>
-            </a:r>
-            <a:endParaRPr lang="es-PE" dirty="0"/>
-          </a:p>
-        </p:txBody>
-      </p:sp>
-      <p:pic>
-        <p:nvPicPr>
-          <p:cNvPr id="7" name="Picture 6">
-            <a:extLst>
-              <a:ext uri="{FF2B5EF4-FFF2-40B4-BE49-F238E27FC236}">
-                <a16:creationId xmlns:a16="http://schemas.microsoft.com/office/drawing/2014/main" id="{E0425F6F-91A2-D5A2-7904-A86F2D8C91F4}"/>
-              </a:ext>
-            </a:extLst>
-          </p:cNvPr>
-          <p:cNvPicPr>
-            <a:picLocks noChangeAspect="1"/>
-          </p:cNvPicPr>
-          <p:nvPr/>
-        </p:nvPicPr>
-        <p:blipFill>
-          <a:blip r:embed="rId2"/>
-          <a:stretch>
-            <a:fillRect/>
-          </a:stretch>
-        </p:blipFill>
-        <p:spPr>
-          <a:xfrm>
-            <a:off x="2047461" y="2459661"/>
-            <a:ext cx="1362208" cy="1362208"/>
-          </a:xfrm>
-          <a:prstGeom prst="rect">
-            <a:avLst/>
-          </a:prstGeom>
-        </p:spPr>
-      </p:pic>
-      <p:pic>
-        <p:nvPicPr>
-          <p:cNvPr id="9" name="Picture 8">
-            <a:extLst>
-              <a:ext uri="{FF2B5EF4-FFF2-40B4-BE49-F238E27FC236}">
-                <a16:creationId xmlns:a16="http://schemas.microsoft.com/office/drawing/2014/main" id="{D505B1ED-6CCC-D9B9-13B3-D8EC78C4586F}"/>
-              </a:ext>
-            </a:extLst>
-          </p:cNvPr>
-          <p:cNvPicPr>
-            <a:picLocks noChangeAspect="1"/>
-          </p:cNvPicPr>
-          <p:nvPr/>
-        </p:nvPicPr>
-        <p:blipFill>
-          <a:blip r:embed="rId3"/>
-          <a:stretch>
-            <a:fillRect/>
-          </a:stretch>
-        </p:blipFill>
-        <p:spPr>
-          <a:xfrm>
-            <a:off x="5048117" y="2457391"/>
-            <a:ext cx="1362208" cy="1341568"/>
-          </a:xfrm>
-          <a:prstGeom prst="rect">
-            <a:avLst/>
-          </a:prstGeom>
-        </p:spPr>
-      </p:pic>
-      <p:pic>
-        <p:nvPicPr>
-          <p:cNvPr id="11" name="Picture 10">
-            <a:extLst>
-              <a:ext uri="{FF2B5EF4-FFF2-40B4-BE49-F238E27FC236}">
-                <a16:creationId xmlns:a16="http://schemas.microsoft.com/office/drawing/2014/main" id="{11DF09E5-36B2-060A-882F-E3282D59E6E4}"/>
-              </a:ext>
-            </a:extLst>
-          </p:cNvPr>
-          <p:cNvPicPr>
-            <a:picLocks noChangeAspect="1"/>
-          </p:cNvPicPr>
-          <p:nvPr/>
-        </p:nvPicPr>
-        <p:blipFill>
-          <a:blip r:embed="rId4"/>
-          <a:stretch>
-            <a:fillRect/>
-          </a:stretch>
-        </p:blipFill>
-        <p:spPr>
-          <a:xfrm>
-            <a:off x="9166031" y="2457391"/>
-            <a:ext cx="1362207" cy="1489346"/>
-          </a:xfrm>
-          <a:prstGeom prst="rect">
-            <a:avLst/>
-          </a:prstGeom>
-        </p:spPr>
-      </p:pic>
-      <p:pic>
-        <p:nvPicPr>
-          <p:cNvPr id="13" name="Picture 12">
-            <a:extLst>
-              <a:ext uri="{FF2B5EF4-FFF2-40B4-BE49-F238E27FC236}">
-                <a16:creationId xmlns:a16="http://schemas.microsoft.com/office/drawing/2014/main" id="{D9B6A0B8-292D-EE37-5819-FB2CCC31B952}"/>
-              </a:ext>
-            </a:extLst>
-          </p:cNvPr>
-          <p:cNvPicPr>
-            <a:picLocks noChangeAspect="1"/>
-          </p:cNvPicPr>
-          <p:nvPr/>
-        </p:nvPicPr>
-        <p:blipFill>
-          <a:blip r:embed="rId5"/>
-          <a:stretch>
-            <a:fillRect/>
-          </a:stretch>
-        </p:blipFill>
-        <p:spPr>
-          <a:xfrm>
-            <a:off x="3071738" y="5566729"/>
-            <a:ext cx="995913" cy="1057305"/>
-          </a:xfrm>
-          <a:prstGeom prst="rect">
-            <a:avLst/>
-          </a:prstGeom>
-        </p:spPr>
-      </p:pic>
-      <p:pic>
-        <p:nvPicPr>
-          <p:cNvPr id="15" name="Picture 14">
-            <a:extLst>
-              <a:ext uri="{FF2B5EF4-FFF2-40B4-BE49-F238E27FC236}">
-                <a16:creationId xmlns:a16="http://schemas.microsoft.com/office/drawing/2014/main" id="{05092E49-352F-1650-CAD7-F79051843820}"/>
-              </a:ext>
-            </a:extLst>
-          </p:cNvPr>
-          <p:cNvPicPr>
-            <a:picLocks noChangeAspect="1"/>
-          </p:cNvPicPr>
-          <p:nvPr/>
-        </p:nvPicPr>
-        <p:blipFill>
-          <a:blip r:embed="rId6"/>
-          <a:stretch>
-            <a:fillRect/>
-          </a:stretch>
-        </p:blipFill>
-        <p:spPr>
-          <a:xfrm>
-            <a:off x="6780764" y="5230281"/>
-            <a:ext cx="1095375" cy="1504950"/>
-          </a:xfrm>
-          <a:prstGeom prst="rect">
-            <a:avLst/>
-          </a:prstGeom>
-        </p:spPr>
-      </p:pic>
-      <p:pic>
-        <p:nvPicPr>
-          <p:cNvPr id="17" name="Picture 16">
-            <a:extLst>
-              <a:ext uri="{FF2B5EF4-FFF2-40B4-BE49-F238E27FC236}">
-                <a16:creationId xmlns:a16="http://schemas.microsoft.com/office/drawing/2014/main" id="{8E728286-E0CC-FA4C-89F3-46F616BC3F15}"/>
-              </a:ext>
-            </a:extLst>
-          </p:cNvPr>
-          <p:cNvPicPr>
-            <a:picLocks noChangeAspect="1"/>
-          </p:cNvPicPr>
-          <p:nvPr/>
-        </p:nvPicPr>
-        <p:blipFill>
-          <a:blip r:embed="rId7"/>
-          <a:stretch>
-            <a:fillRect/>
-          </a:stretch>
-        </p:blipFill>
-        <p:spPr>
-          <a:xfrm>
-            <a:off x="8834085" y="5180366"/>
-            <a:ext cx="1304925" cy="1485900"/>
-          </a:xfrm>
-          <a:prstGeom prst="rect">
-            <a:avLst/>
-          </a:prstGeom>
-        </p:spPr>
-      </p:pic>
-    </p:spTree>
-    <p:extLst>
-      <p:ext uri="{BB962C8B-B14F-4D97-AF65-F5344CB8AC3E}">
-        <p14:creationId xmlns:p14="http://schemas.microsoft.com/office/powerpoint/2010/main" val="103563340"/>
-      </p:ext>
-    </p:extLst>
-  </p:cSld>
-  <p:clrMapOvr>
-    <a:masterClrMapping/>
-  </p:clrMapOvr>
-</p:sld>
-</file>
-
-<file path=ppt/slides/slide12.xml><?xml version="1.0" encoding="utf-8"?>
 <p:sld xmlns:a="http://schemas.openxmlformats.org/drawingml/2006/main" xmlns:r="http://schemas.openxmlformats.org/officeDocument/2006/relationships" xmlns:p="http://schemas.openxmlformats.org/presentationml/2006/main">
   <p:cSld>
     <p:spTree>
@@ -5005,7 +4242,7 @@
 </p:sld>
 </file>
 
-<file path=ppt/slides/slide13.xml><?xml version="1.0" encoding="utf-8"?>
+<file path=ppt/slides/slide12.xml><?xml version="1.0" encoding="utf-8"?>
 <p:sld xmlns:a="http://schemas.openxmlformats.org/drawingml/2006/main" xmlns:r="http://schemas.openxmlformats.org/officeDocument/2006/relationships" xmlns:p="http://schemas.openxmlformats.org/presentationml/2006/main">
   <p:cSld>
     <p:spTree>
@@ -5165,6 +4402,774 @@
     <p:extLst>
       <p:ext uri="{BB962C8B-B14F-4D97-AF65-F5344CB8AC3E}">
         <p14:creationId xmlns:p14="http://schemas.microsoft.com/office/powerpoint/2010/main" val="3054148762"/>
+      </p:ext>
+    </p:extLst>
+  </p:cSld>
+  <p:clrMapOvr>
+    <a:masterClrMapping/>
+  </p:clrMapOvr>
+</p:sld>
+</file>
+
+<file path=ppt/slides/slide13.xml><?xml version="1.0" encoding="utf-8"?>
+<p:sld xmlns:a="http://schemas.openxmlformats.org/drawingml/2006/main" xmlns:r="http://schemas.openxmlformats.org/officeDocument/2006/relationships" xmlns:p="http://schemas.openxmlformats.org/presentationml/2006/main">
+  <p:cSld>
+    <p:spTree>
+      <p:nvGrpSpPr>
+        <p:cNvPr id="1" name="">
+          <a:extLst>
+            <a:ext uri="{FF2B5EF4-FFF2-40B4-BE49-F238E27FC236}">
+              <a16:creationId xmlns:a16="http://schemas.microsoft.com/office/drawing/2014/main" id="{9ED86250-4C33-ED30-FC66-E913317A9571}"/>
+            </a:ext>
+          </a:extLst>
+        </p:cNvPr>
+        <p:cNvGrpSpPr/>
+        <p:nvPr/>
+      </p:nvGrpSpPr>
+      <p:grpSpPr>
+        <a:xfrm>
+          <a:off x="0" y="0"/>
+          <a:ext cx="0" cy="0"/>
+          <a:chOff x="0" y="0"/>
+          <a:chExt cx="0" cy="0"/>
+        </a:xfrm>
+      </p:grpSpPr>
+      <p:sp>
+        <p:nvSpPr>
+          <p:cNvPr id="2" name="Title 1">
+            <a:extLst>
+              <a:ext uri="{FF2B5EF4-FFF2-40B4-BE49-F238E27FC236}">
+                <a16:creationId xmlns:a16="http://schemas.microsoft.com/office/drawing/2014/main" id="{48E0CA0D-EA6F-9FEE-76E5-FD1A1C1B4571}"/>
+              </a:ext>
+            </a:extLst>
+          </p:cNvPr>
+          <p:cNvSpPr>
+            <a:spLocks noGrp="1"/>
+          </p:cNvSpPr>
+          <p:nvPr>
+            <p:ph type="title"/>
+          </p:nvPr>
+        </p:nvSpPr>
+        <p:spPr>
+          <a:xfrm>
+            <a:off x="182593" y="73073"/>
+            <a:ext cx="10515600" cy="1325563"/>
+          </a:xfrm>
+        </p:spPr>
+        <p:txBody>
+          <a:bodyPr/>
+          <a:lstStyle/>
+          <a:p>
+            <a:r>
+              <a:rPr lang="es-MX" dirty="0"/>
+              <a:t>La república</a:t>
+            </a:r>
+            <a:endParaRPr lang="es-PE" dirty="0"/>
+          </a:p>
+        </p:txBody>
+      </p:sp>
+      <p:sp>
+        <p:nvSpPr>
+          <p:cNvPr id="3" name="Content Placeholder 4">
+            <a:extLst>
+              <a:ext uri="{FF2B5EF4-FFF2-40B4-BE49-F238E27FC236}">
+                <a16:creationId xmlns:a16="http://schemas.microsoft.com/office/drawing/2014/main" id="{B8DFFCF7-A823-9F15-0F9E-1179B5EF0B8E}"/>
+              </a:ext>
+            </a:extLst>
+          </p:cNvPr>
+          <p:cNvSpPr>
+            <a:spLocks noGrp="1"/>
+          </p:cNvSpPr>
+          <p:nvPr>
+            <p:ph idx="1"/>
+          </p:nvPr>
+        </p:nvSpPr>
+        <p:spPr>
+          <a:xfrm>
+            <a:off x="838200" y="1485307"/>
+            <a:ext cx="10515600" cy="4351338"/>
+          </a:xfrm>
+        </p:spPr>
+        <p:txBody>
+          <a:bodyPr>
+            <a:normAutofit/>
+          </a:bodyPr>
+          <a:lstStyle/>
+          <a:p>
+            <a:pPr marL="0" indent="0">
+              <a:buNone/>
+            </a:pPr>
+            <a:r>
+              <a:rPr lang="es-MX" dirty="0"/>
+              <a:t>Sócrates                             Céfalo                               Polemarco   </a:t>
+            </a:r>
+          </a:p>
+          <a:p>
+            <a:pPr marL="0" indent="0">
+              <a:buNone/>
+            </a:pPr>
+            <a:endParaRPr lang="es-MX" dirty="0"/>
+          </a:p>
+          <a:p>
+            <a:pPr marL="0" indent="0">
+              <a:buNone/>
+            </a:pPr>
+            <a:endParaRPr lang="es-MX" dirty="0"/>
+          </a:p>
+          <a:p>
+            <a:pPr marL="0" indent="0">
+              <a:buNone/>
+            </a:pPr>
+            <a:endParaRPr lang="es-MX" dirty="0"/>
+          </a:p>
+          <a:p>
+            <a:pPr marL="0" indent="0">
+              <a:buNone/>
+            </a:pPr>
+            <a:endParaRPr lang="es-MX" dirty="0"/>
+          </a:p>
+          <a:p>
+            <a:pPr marL="0" indent="0">
+              <a:buNone/>
+            </a:pPr>
+            <a:r>
+              <a:rPr lang="es-MX" dirty="0" err="1"/>
+              <a:t>Trasímaco</a:t>
+            </a:r>
+            <a:r>
+              <a:rPr lang="es-MX" dirty="0"/>
+              <a:t>                          Glaucón                              </a:t>
+            </a:r>
+            <a:r>
+              <a:rPr lang="es-MX" dirty="0" err="1"/>
+              <a:t>Adimanto</a:t>
+            </a:r>
+            <a:endParaRPr lang="es-PE" dirty="0"/>
+          </a:p>
+        </p:txBody>
+      </p:sp>
+      <p:sp>
+        <p:nvSpPr>
+          <p:cNvPr id="4" name="Content Placeholder 4">
+            <a:extLst>
+              <a:ext uri="{FF2B5EF4-FFF2-40B4-BE49-F238E27FC236}">
+                <a16:creationId xmlns:a16="http://schemas.microsoft.com/office/drawing/2014/main" id="{CFE8FC43-BFF8-9385-CC19-AA8516A3F2DB}"/>
+              </a:ext>
+            </a:extLst>
+          </p:cNvPr>
+          <p:cNvSpPr txBox="1">
+            <a:spLocks/>
+          </p:cNvSpPr>
+          <p:nvPr/>
+        </p:nvSpPr>
+        <p:spPr>
+          <a:xfrm>
+            <a:off x="838200" y="1975638"/>
+            <a:ext cx="10515600" cy="1165127"/>
+          </a:xfrm>
+          <a:prstGeom prst="rect">
+            <a:avLst/>
+          </a:prstGeom>
+        </p:spPr>
+        <p:txBody>
+          <a:bodyPr vert="horz" lIns="91440" tIns="45720" rIns="91440" bIns="45720" rtlCol="0">
+            <a:normAutofit/>
+          </a:bodyPr>
+          <a:lstStyle>
+            <a:lvl1pPr marL="228600" indent="-228600" algn="l" defTabSz="914400" rtl="0" eaLnBrk="1" latinLnBrk="0" hangingPunct="1">
+              <a:lnSpc>
+                <a:spcPct val="90000"/>
+              </a:lnSpc>
+              <a:spcBef>
+                <a:spcPts val="1000"/>
+              </a:spcBef>
+              <a:buFont typeface="Arial" panose="020B0604020202020204" pitchFamily="34" charset="0"/>
+              <a:buChar char="•"/>
+              <a:defRPr sz="2800" kern="1200">
+                <a:solidFill>
+                  <a:schemeClr val="tx1"/>
+                </a:solidFill>
+                <a:latin typeface="+mn-lt"/>
+                <a:ea typeface="+mn-ea"/>
+                <a:cs typeface="+mn-cs"/>
+              </a:defRPr>
+            </a:lvl1pPr>
+            <a:lvl2pPr marL="685800" indent="-228600" algn="l" defTabSz="914400" rtl="0" eaLnBrk="1" latinLnBrk="0" hangingPunct="1">
+              <a:lnSpc>
+                <a:spcPct val="90000"/>
+              </a:lnSpc>
+              <a:spcBef>
+                <a:spcPts val="500"/>
+              </a:spcBef>
+              <a:buFont typeface="Arial" panose="020B0604020202020204" pitchFamily="34" charset="0"/>
+              <a:buChar char="•"/>
+              <a:defRPr sz="2400" kern="1200">
+                <a:solidFill>
+                  <a:schemeClr val="tx1"/>
+                </a:solidFill>
+                <a:latin typeface="+mn-lt"/>
+                <a:ea typeface="+mn-ea"/>
+                <a:cs typeface="+mn-cs"/>
+              </a:defRPr>
+            </a:lvl2pPr>
+            <a:lvl3pPr marL="1143000" indent="-228600" algn="l" defTabSz="914400" rtl="0" eaLnBrk="1" latinLnBrk="0" hangingPunct="1">
+              <a:lnSpc>
+                <a:spcPct val="90000"/>
+              </a:lnSpc>
+              <a:spcBef>
+                <a:spcPts val="500"/>
+              </a:spcBef>
+              <a:buFont typeface="Arial" panose="020B0604020202020204" pitchFamily="34" charset="0"/>
+              <a:buChar char="•"/>
+              <a:defRPr sz="2000" kern="1200">
+                <a:solidFill>
+                  <a:schemeClr val="tx1"/>
+                </a:solidFill>
+                <a:latin typeface="+mn-lt"/>
+                <a:ea typeface="+mn-ea"/>
+                <a:cs typeface="+mn-cs"/>
+              </a:defRPr>
+            </a:lvl3pPr>
+            <a:lvl4pPr marL="1600200" indent="-228600" algn="l" defTabSz="914400" rtl="0" eaLnBrk="1" latinLnBrk="0" hangingPunct="1">
+              <a:lnSpc>
+                <a:spcPct val="90000"/>
+              </a:lnSpc>
+              <a:spcBef>
+                <a:spcPts val="500"/>
+              </a:spcBef>
+              <a:buFont typeface="Arial" panose="020B0604020202020204" pitchFamily="34" charset="0"/>
+              <a:buChar char="•"/>
+              <a:defRPr sz="1800" kern="1200">
+                <a:solidFill>
+                  <a:schemeClr val="tx1"/>
+                </a:solidFill>
+                <a:latin typeface="+mn-lt"/>
+                <a:ea typeface="+mn-ea"/>
+                <a:cs typeface="+mn-cs"/>
+              </a:defRPr>
+            </a:lvl4pPr>
+            <a:lvl5pPr marL="2057400" indent="-228600" algn="l" defTabSz="914400" rtl="0" eaLnBrk="1" latinLnBrk="0" hangingPunct="1">
+              <a:lnSpc>
+                <a:spcPct val="90000"/>
+              </a:lnSpc>
+              <a:spcBef>
+                <a:spcPts val="500"/>
+              </a:spcBef>
+              <a:buFont typeface="Arial" panose="020B0604020202020204" pitchFamily="34" charset="0"/>
+              <a:buChar char="•"/>
+              <a:defRPr sz="1800" kern="1200">
+                <a:solidFill>
+                  <a:schemeClr val="tx1"/>
+                </a:solidFill>
+                <a:latin typeface="+mn-lt"/>
+                <a:ea typeface="+mn-ea"/>
+                <a:cs typeface="+mn-cs"/>
+              </a:defRPr>
+            </a:lvl5pPr>
+            <a:lvl6pPr marL="2514600" indent="-228600" algn="l" defTabSz="914400" rtl="0" eaLnBrk="1" latinLnBrk="0" hangingPunct="1">
+              <a:lnSpc>
+                <a:spcPct val="90000"/>
+              </a:lnSpc>
+              <a:spcBef>
+                <a:spcPts val="500"/>
+              </a:spcBef>
+              <a:buFont typeface="Arial" panose="020B0604020202020204" pitchFamily="34" charset="0"/>
+              <a:buChar char="•"/>
+              <a:defRPr sz="1800" kern="1200">
+                <a:solidFill>
+                  <a:schemeClr val="tx1"/>
+                </a:solidFill>
+                <a:latin typeface="+mn-lt"/>
+                <a:ea typeface="+mn-ea"/>
+                <a:cs typeface="+mn-cs"/>
+              </a:defRPr>
+            </a:lvl6pPr>
+            <a:lvl7pPr marL="2971800" indent="-228600" algn="l" defTabSz="914400" rtl="0" eaLnBrk="1" latinLnBrk="0" hangingPunct="1">
+              <a:lnSpc>
+                <a:spcPct val="90000"/>
+              </a:lnSpc>
+              <a:spcBef>
+                <a:spcPts val="500"/>
+              </a:spcBef>
+              <a:buFont typeface="Arial" panose="020B0604020202020204" pitchFamily="34" charset="0"/>
+              <a:buChar char="•"/>
+              <a:defRPr sz="1800" kern="1200">
+                <a:solidFill>
+                  <a:schemeClr val="tx1"/>
+                </a:solidFill>
+                <a:latin typeface="+mn-lt"/>
+                <a:ea typeface="+mn-ea"/>
+                <a:cs typeface="+mn-cs"/>
+              </a:defRPr>
+            </a:lvl7pPr>
+            <a:lvl8pPr marL="3429000" indent="-228600" algn="l" defTabSz="914400" rtl="0" eaLnBrk="1" latinLnBrk="0" hangingPunct="1">
+              <a:lnSpc>
+                <a:spcPct val="90000"/>
+              </a:lnSpc>
+              <a:spcBef>
+                <a:spcPts val="500"/>
+              </a:spcBef>
+              <a:buFont typeface="Arial" panose="020B0604020202020204" pitchFamily="34" charset="0"/>
+              <a:buChar char="•"/>
+              <a:defRPr sz="1800" kern="1200">
+                <a:solidFill>
+                  <a:schemeClr val="tx1"/>
+                </a:solidFill>
+                <a:latin typeface="+mn-lt"/>
+                <a:ea typeface="+mn-ea"/>
+                <a:cs typeface="+mn-cs"/>
+              </a:defRPr>
+            </a:lvl8pPr>
+            <a:lvl9pPr marL="3886200" indent="-228600" algn="l" defTabSz="914400" rtl="0" eaLnBrk="1" latinLnBrk="0" hangingPunct="1">
+              <a:lnSpc>
+                <a:spcPct val="90000"/>
+              </a:lnSpc>
+              <a:spcBef>
+                <a:spcPts val="500"/>
+              </a:spcBef>
+              <a:buFont typeface="Arial" panose="020B0604020202020204" pitchFamily="34" charset="0"/>
+              <a:buChar char="•"/>
+              <a:defRPr sz="1800" kern="1200">
+                <a:solidFill>
+                  <a:schemeClr val="tx1"/>
+                </a:solidFill>
+                <a:latin typeface="+mn-lt"/>
+                <a:ea typeface="+mn-ea"/>
+                <a:cs typeface="+mn-cs"/>
+              </a:defRPr>
+            </a:lvl9pPr>
+          </a:lstStyle>
+          <a:p>
+            <a:pPr marL="0" indent="0">
+              <a:buFont typeface="Arial" panose="020B0604020202020204" pitchFamily="34" charset="0"/>
+              <a:buNone/>
+            </a:pPr>
+            <a:r>
+              <a:rPr lang="es-MX" dirty="0"/>
+              <a:t>Busca definir                          Visión tradicional de justicia (distributiva)</a:t>
+            </a:r>
+          </a:p>
+          <a:p>
+            <a:pPr marL="0" indent="0">
+              <a:buFont typeface="Arial" panose="020B0604020202020204" pitchFamily="34" charset="0"/>
+              <a:buNone/>
+            </a:pPr>
+            <a:r>
+              <a:rPr lang="es-MX" dirty="0"/>
+              <a:t>Justicia</a:t>
+            </a:r>
+            <a:endParaRPr lang="es-PE" dirty="0"/>
+          </a:p>
+        </p:txBody>
+      </p:sp>
+      <p:sp>
+        <p:nvSpPr>
+          <p:cNvPr id="5" name="Content Placeholder 4">
+            <a:extLst>
+              <a:ext uri="{FF2B5EF4-FFF2-40B4-BE49-F238E27FC236}">
+                <a16:creationId xmlns:a16="http://schemas.microsoft.com/office/drawing/2014/main" id="{70DA167E-14BC-044F-AC70-1AC34AF74660}"/>
+              </a:ext>
+            </a:extLst>
+          </p:cNvPr>
+          <p:cNvSpPr txBox="1">
+            <a:spLocks/>
+          </p:cNvSpPr>
+          <p:nvPr/>
+        </p:nvSpPr>
+        <p:spPr>
+          <a:xfrm>
+            <a:off x="838200" y="4609258"/>
+            <a:ext cx="10515600" cy="4351338"/>
+          </a:xfrm>
+          <a:prstGeom prst="rect">
+            <a:avLst/>
+          </a:prstGeom>
+        </p:spPr>
+        <p:txBody>
+          <a:bodyPr vert="horz" lIns="91440" tIns="45720" rIns="91440" bIns="45720" rtlCol="0">
+            <a:normAutofit/>
+          </a:bodyPr>
+          <a:lstStyle>
+            <a:lvl1pPr marL="228600" indent="-228600" algn="l" defTabSz="914400" rtl="0" eaLnBrk="1" latinLnBrk="0" hangingPunct="1">
+              <a:lnSpc>
+                <a:spcPct val="90000"/>
+              </a:lnSpc>
+              <a:spcBef>
+                <a:spcPts val="1000"/>
+              </a:spcBef>
+              <a:buFont typeface="Arial" panose="020B0604020202020204" pitchFamily="34" charset="0"/>
+              <a:buChar char="•"/>
+              <a:defRPr sz="2800" kern="1200">
+                <a:solidFill>
+                  <a:schemeClr val="tx1"/>
+                </a:solidFill>
+                <a:latin typeface="+mn-lt"/>
+                <a:ea typeface="+mn-ea"/>
+                <a:cs typeface="+mn-cs"/>
+              </a:defRPr>
+            </a:lvl1pPr>
+            <a:lvl2pPr marL="685800" indent="-228600" algn="l" defTabSz="914400" rtl="0" eaLnBrk="1" latinLnBrk="0" hangingPunct="1">
+              <a:lnSpc>
+                <a:spcPct val="90000"/>
+              </a:lnSpc>
+              <a:spcBef>
+                <a:spcPts val="500"/>
+              </a:spcBef>
+              <a:buFont typeface="Arial" panose="020B0604020202020204" pitchFamily="34" charset="0"/>
+              <a:buChar char="•"/>
+              <a:defRPr sz="2400" kern="1200">
+                <a:solidFill>
+                  <a:schemeClr val="tx1"/>
+                </a:solidFill>
+                <a:latin typeface="+mn-lt"/>
+                <a:ea typeface="+mn-ea"/>
+                <a:cs typeface="+mn-cs"/>
+              </a:defRPr>
+            </a:lvl2pPr>
+            <a:lvl3pPr marL="1143000" indent="-228600" algn="l" defTabSz="914400" rtl="0" eaLnBrk="1" latinLnBrk="0" hangingPunct="1">
+              <a:lnSpc>
+                <a:spcPct val="90000"/>
+              </a:lnSpc>
+              <a:spcBef>
+                <a:spcPts val="500"/>
+              </a:spcBef>
+              <a:buFont typeface="Arial" panose="020B0604020202020204" pitchFamily="34" charset="0"/>
+              <a:buChar char="•"/>
+              <a:defRPr sz="2000" kern="1200">
+                <a:solidFill>
+                  <a:schemeClr val="tx1"/>
+                </a:solidFill>
+                <a:latin typeface="+mn-lt"/>
+                <a:ea typeface="+mn-ea"/>
+                <a:cs typeface="+mn-cs"/>
+              </a:defRPr>
+            </a:lvl3pPr>
+            <a:lvl4pPr marL="1600200" indent="-228600" algn="l" defTabSz="914400" rtl="0" eaLnBrk="1" latinLnBrk="0" hangingPunct="1">
+              <a:lnSpc>
+                <a:spcPct val="90000"/>
+              </a:lnSpc>
+              <a:spcBef>
+                <a:spcPts val="500"/>
+              </a:spcBef>
+              <a:buFont typeface="Arial" panose="020B0604020202020204" pitchFamily="34" charset="0"/>
+              <a:buChar char="•"/>
+              <a:defRPr sz="1800" kern="1200">
+                <a:solidFill>
+                  <a:schemeClr val="tx1"/>
+                </a:solidFill>
+                <a:latin typeface="+mn-lt"/>
+                <a:ea typeface="+mn-ea"/>
+                <a:cs typeface="+mn-cs"/>
+              </a:defRPr>
+            </a:lvl4pPr>
+            <a:lvl5pPr marL="2057400" indent="-228600" algn="l" defTabSz="914400" rtl="0" eaLnBrk="1" latinLnBrk="0" hangingPunct="1">
+              <a:lnSpc>
+                <a:spcPct val="90000"/>
+              </a:lnSpc>
+              <a:spcBef>
+                <a:spcPts val="500"/>
+              </a:spcBef>
+              <a:buFont typeface="Arial" panose="020B0604020202020204" pitchFamily="34" charset="0"/>
+              <a:buChar char="•"/>
+              <a:defRPr sz="1800" kern="1200">
+                <a:solidFill>
+                  <a:schemeClr val="tx1"/>
+                </a:solidFill>
+                <a:latin typeface="+mn-lt"/>
+                <a:ea typeface="+mn-ea"/>
+                <a:cs typeface="+mn-cs"/>
+              </a:defRPr>
+            </a:lvl5pPr>
+            <a:lvl6pPr marL="2514600" indent="-228600" algn="l" defTabSz="914400" rtl="0" eaLnBrk="1" latinLnBrk="0" hangingPunct="1">
+              <a:lnSpc>
+                <a:spcPct val="90000"/>
+              </a:lnSpc>
+              <a:spcBef>
+                <a:spcPts val="500"/>
+              </a:spcBef>
+              <a:buFont typeface="Arial" panose="020B0604020202020204" pitchFamily="34" charset="0"/>
+              <a:buChar char="•"/>
+              <a:defRPr sz="1800" kern="1200">
+                <a:solidFill>
+                  <a:schemeClr val="tx1"/>
+                </a:solidFill>
+                <a:latin typeface="+mn-lt"/>
+                <a:ea typeface="+mn-ea"/>
+                <a:cs typeface="+mn-cs"/>
+              </a:defRPr>
+            </a:lvl6pPr>
+            <a:lvl7pPr marL="2971800" indent="-228600" algn="l" defTabSz="914400" rtl="0" eaLnBrk="1" latinLnBrk="0" hangingPunct="1">
+              <a:lnSpc>
+                <a:spcPct val="90000"/>
+              </a:lnSpc>
+              <a:spcBef>
+                <a:spcPts val="500"/>
+              </a:spcBef>
+              <a:buFont typeface="Arial" panose="020B0604020202020204" pitchFamily="34" charset="0"/>
+              <a:buChar char="•"/>
+              <a:defRPr sz="1800" kern="1200">
+                <a:solidFill>
+                  <a:schemeClr val="tx1"/>
+                </a:solidFill>
+                <a:latin typeface="+mn-lt"/>
+                <a:ea typeface="+mn-ea"/>
+                <a:cs typeface="+mn-cs"/>
+              </a:defRPr>
+            </a:lvl7pPr>
+            <a:lvl8pPr marL="3429000" indent="-228600" algn="l" defTabSz="914400" rtl="0" eaLnBrk="1" latinLnBrk="0" hangingPunct="1">
+              <a:lnSpc>
+                <a:spcPct val="90000"/>
+              </a:lnSpc>
+              <a:spcBef>
+                <a:spcPts val="500"/>
+              </a:spcBef>
+              <a:buFont typeface="Arial" panose="020B0604020202020204" pitchFamily="34" charset="0"/>
+              <a:buChar char="•"/>
+              <a:defRPr sz="1800" kern="1200">
+                <a:solidFill>
+                  <a:schemeClr val="tx1"/>
+                </a:solidFill>
+                <a:latin typeface="+mn-lt"/>
+                <a:ea typeface="+mn-ea"/>
+                <a:cs typeface="+mn-cs"/>
+              </a:defRPr>
+            </a:lvl8pPr>
+            <a:lvl9pPr marL="3886200" indent="-228600" algn="l" defTabSz="914400" rtl="0" eaLnBrk="1" latinLnBrk="0" hangingPunct="1">
+              <a:lnSpc>
+                <a:spcPct val="90000"/>
+              </a:lnSpc>
+              <a:spcBef>
+                <a:spcPts val="500"/>
+              </a:spcBef>
+              <a:buFont typeface="Arial" panose="020B0604020202020204" pitchFamily="34" charset="0"/>
+              <a:buChar char="•"/>
+              <a:defRPr sz="1800" kern="1200">
+                <a:solidFill>
+                  <a:schemeClr val="tx1"/>
+                </a:solidFill>
+                <a:latin typeface="+mn-lt"/>
+                <a:ea typeface="+mn-ea"/>
+                <a:cs typeface="+mn-cs"/>
+              </a:defRPr>
+            </a:lvl9pPr>
+          </a:lstStyle>
+          <a:p>
+            <a:pPr marL="0" indent="0">
+              <a:buFont typeface="Arial" panose="020B0604020202020204" pitchFamily="34" charset="0"/>
+              <a:buNone/>
+            </a:pPr>
+            <a:r>
+              <a:rPr lang="es-MX" dirty="0"/>
+              <a:t>Sofista: Justicia                    hermanos de Platón: La justicia es deseable</a:t>
+            </a:r>
+          </a:p>
+          <a:p>
+            <a:pPr marL="0" indent="0">
+              <a:buFont typeface="Arial" panose="020B0604020202020204" pitchFamily="34" charset="0"/>
+              <a:buNone/>
+            </a:pPr>
+            <a:r>
+              <a:rPr lang="es-MX" dirty="0"/>
+              <a:t>Lo que conviene                  por sí misma.</a:t>
+            </a:r>
+          </a:p>
+          <a:p>
+            <a:pPr marL="0" indent="0">
+              <a:buFont typeface="Arial" panose="020B0604020202020204" pitchFamily="34" charset="0"/>
+              <a:buNone/>
+            </a:pPr>
+            <a:r>
+              <a:rPr lang="es-MX" dirty="0"/>
+              <a:t>Al mas fuerte</a:t>
+            </a:r>
+            <a:endParaRPr lang="es-PE" dirty="0"/>
+          </a:p>
+        </p:txBody>
+      </p:sp>
+      <p:pic>
+        <p:nvPicPr>
+          <p:cNvPr id="7" name="Picture 6">
+            <a:extLst>
+              <a:ext uri="{FF2B5EF4-FFF2-40B4-BE49-F238E27FC236}">
+                <a16:creationId xmlns:a16="http://schemas.microsoft.com/office/drawing/2014/main" id="{E0425F6F-91A2-D5A2-7904-A86F2D8C91F4}"/>
+              </a:ext>
+            </a:extLst>
+          </p:cNvPr>
+          <p:cNvPicPr>
+            <a:picLocks noChangeAspect="1"/>
+          </p:cNvPicPr>
+          <p:nvPr/>
+        </p:nvPicPr>
+        <p:blipFill>
+          <a:blip r:embed="rId2"/>
+          <a:stretch>
+            <a:fillRect/>
+          </a:stretch>
+        </p:blipFill>
+        <p:spPr>
+          <a:xfrm>
+            <a:off x="2047461" y="2459661"/>
+            <a:ext cx="1362208" cy="1362208"/>
+          </a:xfrm>
+          <a:prstGeom prst="rect">
+            <a:avLst/>
+          </a:prstGeom>
+        </p:spPr>
+      </p:pic>
+      <p:pic>
+        <p:nvPicPr>
+          <p:cNvPr id="9" name="Picture 8">
+            <a:extLst>
+              <a:ext uri="{FF2B5EF4-FFF2-40B4-BE49-F238E27FC236}">
+                <a16:creationId xmlns:a16="http://schemas.microsoft.com/office/drawing/2014/main" id="{D505B1ED-6CCC-D9B9-13B3-D8EC78C4586F}"/>
+              </a:ext>
+            </a:extLst>
+          </p:cNvPr>
+          <p:cNvPicPr>
+            <a:picLocks noChangeAspect="1"/>
+          </p:cNvPicPr>
+          <p:nvPr/>
+        </p:nvPicPr>
+        <p:blipFill>
+          <a:blip r:embed="rId3"/>
+          <a:stretch>
+            <a:fillRect/>
+          </a:stretch>
+        </p:blipFill>
+        <p:spPr>
+          <a:xfrm>
+            <a:off x="5048117" y="2457391"/>
+            <a:ext cx="1362208" cy="1341568"/>
+          </a:xfrm>
+          <a:prstGeom prst="rect">
+            <a:avLst/>
+          </a:prstGeom>
+        </p:spPr>
+      </p:pic>
+      <p:pic>
+        <p:nvPicPr>
+          <p:cNvPr id="11" name="Picture 10">
+            <a:extLst>
+              <a:ext uri="{FF2B5EF4-FFF2-40B4-BE49-F238E27FC236}">
+                <a16:creationId xmlns:a16="http://schemas.microsoft.com/office/drawing/2014/main" id="{11DF09E5-36B2-060A-882F-E3282D59E6E4}"/>
+              </a:ext>
+            </a:extLst>
+          </p:cNvPr>
+          <p:cNvPicPr>
+            <a:picLocks noChangeAspect="1"/>
+          </p:cNvPicPr>
+          <p:nvPr/>
+        </p:nvPicPr>
+        <p:blipFill>
+          <a:blip r:embed="rId4"/>
+          <a:stretch>
+            <a:fillRect/>
+          </a:stretch>
+        </p:blipFill>
+        <p:spPr>
+          <a:xfrm>
+            <a:off x="9166031" y="2457391"/>
+            <a:ext cx="1362207" cy="1489346"/>
+          </a:xfrm>
+          <a:prstGeom prst="rect">
+            <a:avLst/>
+          </a:prstGeom>
+        </p:spPr>
+      </p:pic>
+      <p:pic>
+        <p:nvPicPr>
+          <p:cNvPr id="13" name="Picture 12">
+            <a:extLst>
+              <a:ext uri="{FF2B5EF4-FFF2-40B4-BE49-F238E27FC236}">
+                <a16:creationId xmlns:a16="http://schemas.microsoft.com/office/drawing/2014/main" id="{D9B6A0B8-292D-EE37-5819-FB2CCC31B952}"/>
+              </a:ext>
+            </a:extLst>
+          </p:cNvPr>
+          <p:cNvPicPr>
+            <a:picLocks noChangeAspect="1"/>
+          </p:cNvPicPr>
+          <p:nvPr/>
+        </p:nvPicPr>
+        <p:blipFill>
+          <a:blip r:embed="rId5"/>
+          <a:stretch>
+            <a:fillRect/>
+          </a:stretch>
+        </p:blipFill>
+        <p:spPr>
+          <a:xfrm>
+            <a:off x="3071738" y="5566729"/>
+            <a:ext cx="995913" cy="1057305"/>
+          </a:xfrm>
+          <a:prstGeom prst="rect">
+            <a:avLst/>
+          </a:prstGeom>
+        </p:spPr>
+      </p:pic>
+      <p:pic>
+        <p:nvPicPr>
+          <p:cNvPr id="15" name="Picture 14">
+            <a:extLst>
+              <a:ext uri="{FF2B5EF4-FFF2-40B4-BE49-F238E27FC236}">
+                <a16:creationId xmlns:a16="http://schemas.microsoft.com/office/drawing/2014/main" id="{05092E49-352F-1650-CAD7-F79051843820}"/>
+              </a:ext>
+            </a:extLst>
+          </p:cNvPr>
+          <p:cNvPicPr>
+            <a:picLocks noChangeAspect="1"/>
+          </p:cNvPicPr>
+          <p:nvPr/>
+        </p:nvPicPr>
+        <p:blipFill>
+          <a:blip r:embed="rId6"/>
+          <a:stretch>
+            <a:fillRect/>
+          </a:stretch>
+        </p:blipFill>
+        <p:spPr>
+          <a:xfrm>
+            <a:off x="6780764" y="5230281"/>
+            <a:ext cx="1095375" cy="1504950"/>
+          </a:xfrm>
+          <a:prstGeom prst="rect">
+            <a:avLst/>
+          </a:prstGeom>
+        </p:spPr>
+      </p:pic>
+      <p:pic>
+        <p:nvPicPr>
+          <p:cNvPr id="17" name="Picture 16">
+            <a:extLst>
+              <a:ext uri="{FF2B5EF4-FFF2-40B4-BE49-F238E27FC236}">
+                <a16:creationId xmlns:a16="http://schemas.microsoft.com/office/drawing/2014/main" id="{8E728286-E0CC-FA4C-89F3-46F616BC3F15}"/>
+              </a:ext>
+            </a:extLst>
+          </p:cNvPr>
+          <p:cNvPicPr>
+            <a:picLocks noChangeAspect="1"/>
+          </p:cNvPicPr>
+          <p:nvPr/>
+        </p:nvPicPr>
+        <p:blipFill>
+          <a:blip r:embed="rId7"/>
+          <a:stretch>
+            <a:fillRect/>
+          </a:stretch>
+        </p:blipFill>
+        <p:spPr>
+          <a:xfrm>
+            <a:off x="8834085" y="5180366"/>
+            <a:ext cx="1304925" cy="1485900"/>
+          </a:xfrm>
+          <a:prstGeom prst="rect">
+            <a:avLst/>
+          </a:prstGeom>
+        </p:spPr>
+      </p:pic>
+    </p:spTree>
+    <p:extLst>
+      <p:ext uri="{BB962C8B-B14F-4D97-AF65-F5344CB8AC3E}">
+        <p14:creationId xmlns:p14="http://schemas.microsoft.com/office/powerpoint/2010/main" val="103563340"/>
       </p:ext>
     </p:extLst>
   </p:cSld>
